--- a/pptx/Fig4.pptx
+++ b/pptx/Fig4.pptx
@@ -243,7 +243,7 @@
           <a:p>
             <a:fld id="{3F343942-9C72-497E-8EFA-1E40F2F227BC}" type="datetimeFigureOut">
               <a:rPr lang="en-US" smtClean="0"/>
-              <a:t>10/19/2026</a:t>
+              <a:t>10/27/2026</a:t>
             </a:fld>
             <a:endParaRPr lang="en-US"/>
           </a:p>
@@ -413,7 +413,7 @@
           <a:p>
             <a:fld id="{3F343942-9C72-497E-8EFA-1E40F2F227BC}" type="datetimeFigureOut">
               <a:rPr lang="en-US" smtClean="0"/>
-              <a:t>10/19/2026</a:t>
+              <a:t>10/27/2026</a:t>
             </a:fld>
             <a:endParaRPr lang="en-US"/>
           </a:p>
@@ -593,7 +593,7 @@
           <a:p>
             <a:fld id="{3F343942-9C72-497E-8EFA-1E40F2F227BC}" type="datetimeFigureOut">
               <a:rPr lang="en-US" smtClean="0"/>
-              <a:t>10/19/2026</a:t>
+              <a:t>10/27/2026</a:t>
             </a:fld>
             <a:endParaRPr lang="en-US"/>
           </a:p>
@@ -763,7 +763,7 @@
           <a:p>
             <a:fld id="{3F343942-9C72-497E-8EFA-1E40F2F227BC}" type="datetimeFigureOut">
               <a:rPr lang="en-US" smtClean="0"/>
-              <a:t>10/19/2026</a:t>
+              <a:t>10/27/2026</a:t>
             </a:fld>
             <a:endParaRPr lang="en-US"/>
           </a:p>
@@ -1009,7 +1009,7 @@
           <a:p>
             <a:fld id="{3F343942-9C72-497E-8EFA-1E40F2F227BC}" type="datetimeFigureOut">
               <a:rPr lang="en-US" smtClean="0"/>
-              <a:t>10/19/2026</a:t>
+              <a:t>10/27/2026</a:t>
             </a:fld>
             <a:endParaRPr lang="en-US"/>
           </a:p>
@@ -1241,7 +1241,7 @@
           <a:p>
             <a:fld id="{3F343942-9C72-497E-8EFA-1E40F2F227BC}" type="datetimeFigureOut">
               <a:rPr lang="en-US" smtClean="0"/>
-              <a:t>10/19/2026</a:t>
+              <a:t>10/27/2026</a:t>
             </a:fld>
             <a:endParaRPr lang="en-US"/>
           </a:p>
@@ -1608,7 +1608,7 @@
           <a:p>
             <a:fld id="{3F343942-9C72-497E-8EFA-1E40F2F227BC}" type="datetimeFigureOut">
               <a:rPr lang="en-US" smtClean="0"/>
-              <a:t>10/19/2026</a:t>
+              <a:t>10/27/2026</a:t>
             </a:fld>
             <a:endParaRPr lang="en-US"/>
           </a:p>
@@ -1726,7 +1726,7 @@
           <a:p>
             <a:fld id="{3F343942-9C72-497E-8EFA-1E40F2F227BC}" type="datetimeFigureOut">
               <a:rPr lang="en-US" smtClean="0"/>
-              <a:t>10/19/2026</a:t>
+              <a:t>10/27/2026</a:t>
             </a:fld>
             <a:endParaRPr lang="en-US"/>
           </a:p>
@@ -1821,7 +1821,7 @@
           <a:p>
             <a:fld id="{3F343942-9C72-497E-8EFA-1E40F2F227BC}" type="datetimeFigureOut">
               <a:rPr lang="en-US" smtClean="0"/>
-              <a:t>10/19/2026</a:t>
+              <a:t>10/27/2026</a:t>
             </a:fld>
             <a:endParaRPr lang="en-US"/>
           </a:p>
@@ -2098,7 +2098,7 @@
           <a:p>
             <a:fld id="{3F343942-9C72-497E-8EFA-1E40F2F227BC}" type="datetimeFigureOut">
               <a:rPr lang="en-US" smtClean="0"/>
-              <a:t>10/19/2026</a:t>
+              <a:t>10/27/2026</a:t>
             </a:fld>
             <a:endParaRPr lang="en-US"/>
           </a:p>
@@ -2355,7 +2355,7 @@
           <a:p>
             <a:fld id="{3F343942-9C72-497E-8EFA-1E40F2F227BC}" type="datetimeFigureOut">
               <a:rPr lang="en-US" smtClean="0"/>
-              <a:t>10/19/2026</a:t>
+              <a:t>10/27/2026</a:t>
             </a:fld>
             <a:endParaRPr lang="en-US"/>
           </a:p>
@@ -2568,7 +2568,7 @@
           <a:p>
             <a:fld id="{3F343942-9C72-497E-8EFA-1E40F2F227BC}" type="datetimeFigureOut">
               <a:rPr lang="en-US" smtClean="0"/>
-              <a:t>10/19/2026</a:t>
+              <a:t>10/27/2026</a:t>
             </a:fld>
             <a:endParaRPr lang="en-US"/>
           </a:p>
@@ -2975,10 +2975,10 @@
       </p:grpSpPr>
       <p:pic>
         <p:nvPicPr>
-          <p:cNvPr id="3" name="Picture 2">
+          <p:cNvPr id="4" name="Picture 3">
             <a:extLst>
               <a:ext uri="{FF2B5EF4-FFF2-40B4-BE49-F238E27FC236}">
-                <a16:creationId xmlns:a16="http://schemas.microsoft.com/office/drawing/2014/main" id="{8972868D-F8FB-0AAF-5597-9437140DFBF9}"/>
+                <a16:creationId xmlns:a16="http://schemas.microsoft.com/office/drawing/2014/main" id="{0AC940BB-E3C0-2087-D790-676BD13C39C6}"/>
               </a:ext>
             </a:extLst>
           </p:cNvPr>
@@ -3000,8 +3000,8 @@
         </p:blipFill>
         <p:spPr>
           <a:xfrm>
-            <a:off x="4594118" y="10576"/>
-            <a:ext cx="2856556" cy="2517193"/>
+            <a:off x="163704" y="3922"/>
+            <a:ext cx="4358646" cy="2521356"/>
           </a:xfrm>
           <a:prstGeom prst="rect">
             <a:avLst/>
@@ -3010,10 +3010,10 @@
       </p:pic>
       <p:pic>
         <p:nvPicPr>
-          <p:cNvPr id="4" name="Picture 3">
+          <p:cNvPr id="3" name="Picture 2">
             <a:extLst>
               <a:ext uri="{FF2B5EF4-FFF2-40B4-BE49-F238E27FC236}">
-                <a16:creationId xmlns:a16="http://schemas.microsoft.com/office/drawing/2014/main" id="{0AC940BB-E3C0-2087-D790-676BD13C39C6}"/>
+                <a16:creationId xmlns:a16="http://schemas.microsoft.com/office/drawing/2014/main" id="{8972868D-F8FB-0AAF-5597-9437140DFBF9}"/>
               </a:ext>
             </a:extLst>
           </p:cNvPr>
@@ -3035,8 +3035,8 @@
         </p:blipFill>
         <p:spPr>
           <a:xfrm>
-            <a:off x="163704" y="-5530"/>
-            <a:ext cx="4358647" cy="2540260"/>
+            <a:off x="4594118" y="10576"/>
+            <a:ext cx="2856556" cy="2517192"/>
           </a:xfrm>
           <a:prstGeom prst="rect">
             <a:avLst/>
@@ -3323,42 +3323,6 @@
           </a:p>
         </p:txBody>
       </p:sp>
-      <p:pic>
-        <p:nvPicPr>
-          <p:cNvPr id="22" name="Picture 21">
-            <a:extLst>
-              <a:ext uri="{FF2B5EF4-FFF2-40B4-BE49-F238E27FC236}">
-                <a16:creationId xmlns:a16="http://schemas.microsoft.com/office/drawing/2014/main" id="{DD6C8350-7E7F-BA9D-3FBE-3E59AE1943AB}"/>
-              </a:ext>
-            </a:extLst>
-          </p:cNvPr>
-          <p:cNvPicPr>
-            <a:picLocks noChangeAspect="1"/>
-          </p:cNvPicPr>
-          <p:nvPr/>
-        </p:nvPicPr>
-        <p:blipFill>
-          <a:blip r:embed="rId16">
-            <a:extLst>
-              <a:ext uri="{28A0092B-C50C-407E-A947-70E740481C1C}">
-                <a14:useLocalDpi xmlns:a14="http://schemas.microsoft.com/office/drawing/2010/main" val="0"/>
-              </a:ext>
-            </a:extLst>
-          </a:blip>
-          <a:stretch>
-            <a:fillRect/>
-          </a:stretch>
-        </p:blipFill>
-        <p:spPr>
-          <a:xfrm>
-            <a:off x="2011567" y="939033"/>
-            <a:ext cx="1581915" cy="1033274"/>
-          </a:xfrm>
-          <a:prstGeom prst="rect">
-            <a:avLst/>
-          </a:prstGeom>
-        </p:spPr>
-      </p:pic>
       <p:sp>
         <p:nvSpPr>
           <p:cNvPr id="24" name="TextBox 23">
@@ -3373,7 +3337,7 @@
         </p:nvSpPr>
         <p:spPr>
           <a:xfrm>
-            <a:off x="2315006" y="1384806"/>
+            <a:off x="2019579" y="1377772"/>
             <a:ext cx="360996" cy="261610"/>
           </a:xfrm>
           <a:prstGeom prst="rect">
@@ -3411,7 +3375,7 @@
         </p:nvSpPr>
         <p:spPr>
           <a:xfrm>
-            <a:off x="2649162" y="1254001"/>
+            <a:off x="2312264" y="1246967"/>
             <a:ext cx="255198" cy="261610"/>
           </a:xfrm>
           <a:prstGeom prst="rect">
@@ -3426,7 +3390,7 @@
           <a:lstStyle/>
           <a:p>
             <a:r>
-              <a:rPr lang="en-US" sz="1100">
+              <a:rPr lang="en-US" sz="1100" dirty="0">
                 <a:latin typeface="Times New Roman" panose="02020603050405020304" pitchFamily="18" charset="0"/>
                 <a:cs typeface="Times New Roman" panose="02020603050405020304" pitchFamily="18" charset="0"/>
               </a:rPr>
@@ -3449,7 +3413,7 @@
         </p:nvSpPr>
         <p:spPr>
           <a:xfrm>
-            <a:off x="2843166" y="988741"/>
+            <a:off x="2616922" y="991395"/>
             <a:ext cx="255198" cy="261610"/>
           </a:xfrm>
           <a:prstGeom prst="rect">
@@ -3464,7 +3428,7 @@
           <a:lstStyle/>
           <a:p>
             <a:r>
-              <a:rPr lang="en-US" sz="1100">
+              <a:rPr lang="en-US" sz="1100" dirty="0">
                 <a:latin typeface="Times New Roman" panose="02020603050405020304" pitchFamily="18" charset="0"/>
                 <a:cs typeface="Times New Roman" panose="02020603050405020304" pitchFamily="18" charset="0"/>
               </a:rPr>
@@ -3488,7 +3452,7 @@
           <p:nvPr/>
         </p:nvPicPr>
         <p:blipFill>
-          <a:blip r:embed="rId17">
+          <a:blip r:embed="rId16">
             <a:extLst>
               <a:ext uri="{28A0092B-C50C-407E-A947-70E740481C1C}">
                 <a14:useLocalDpi xmlns:a14="http://schemas.microsoft.com/office/drawing/2010/main" val="0"/>
@@ -3524,7 +3488,7 @@
           <p:nvPr/>
         </p:nvPicPr>
         <p:blipFill>
-          <a:blip r:embed="rId18">
+          <a:blip r:embed="rId17">
             <a:extLst>
               <a:ext uri="{28A0092B-C50C-407E-A947-70E740481C1C}">
                 <a14:useLocalDpi xmlns:a14="http://schemas.microsoft.com/office/drawing/2010/main" val="0"/>
@@ -3688,7 +3652,7 @@
           <p:nvPr/>
         </p:nvPicPr>
         <p:blipFill>
-          <a:blip r:embed="rId19">
+          <a:blip r:embed="rId18">
             <a:extLst>
               <a:ext uri="{28A0092B-C50C-407E-A947-70E740481C1C}">
                 <a14:useLocalDpi xmlns:a14="http://schemas.microsoft.com/office/drawing/2010/main" val="0"/>
@@ -3701,7 +3665,7 @@
         <p:spPr>
           <a:xfrm>
             <a:off x="8407442" y="85323"/>
-            <a:ext cx="2535337" cy="2434753"/>
+            <a:ext cx="2535337" cy="2434752"/>
           </a:xfrm>
           <a:prstGeom prst="rect">
             <a:avLst/>
@@ -6027,7 +5991,7 @@
           </p:nvPr>
         </p:nvPicPr>
         <p:blipFill>
-          <a:blip r:embed="rId20">
+          <a:blip r:embed="rId19">
             <a:extLst>
               <a:ext uri="{28A0092B-C50C-407E-A947-70E740481C1C}">
                 <a14:useLocalDpi xmlns:a14="http://schemas.microsoft.com/office/drawing/2010/main" val="0"/>
@@ -6067,7 +6031,7 @@
           </p:nvPr>
         </p:nvPicPr>
         <p:blipFill>
-          <a:blip r:embed="rId21">
+          <a:blip r:embed="rId20">
             <a:extLst>
               <a:ext uri="{28A0092B-C50C-407E-A947-70E740481C1C}">
                 <a14:useLocalDpi xmlns:a14="http://schemas.microsoft.com/office/drawing/2010/main" val="0"/>
@@ -6107,7 +6071,7 @@
           </p:nvPr>
         </p:nvPicPr>
         <p:blipFill>
-          <a:blip r:embed="rId22">
+          <a:blip r:embed="rId21">
             <a:extLst>
               <a:ext uri="{28A0092B-C50C-407E-A947-70E740481C1C}">
                 <a14:useLocalDpi xmlns:a14="http://schemas.microsoft.com/office/drawing/2010/main" val="0"/>
